--- a/Day3_MixedModels_ModelSelection/FW536_Day3_Morning_mixed effects.pptx
+++ b/Day3_MixedModels_ModelSelection/FW536_Day3_Morning_mixed effects.pptx
@@ -5,7 +5,7 @@
     <p:sldMasterId id="2147483648" r:id="rId1"/>
   </p:sldMasterIdLst>
   <p:notesMasterIdLst>
-    <p:notesMasterId r:id="rId65"/>
+    <p:notesMasterId r:id="rId64"/>
   </p:notesMasterIdLst>
   <p:sldIdLst>
     <p:sldId id="257" r:id="rId2"/>
@@ -65,12 +65,11 @@
     <p:sldId id="299" r:id="rId56"/>
     <p:sldId id="300" r:id="rId57"/>
     <p:sldId id="301" r:id="rId58"/>
-    <p:sldId id="302" r:id="rId59"/>
-    <p:sldId id="303" r:id="rId60"/>
-    <p:sldId id="304" r:id="rId61"/>
-    <p:sldId id="305" r:id="rId62"/>
-    <p:sldId id="306" r:id="rId63"/>
-    <p:sldId id="307" r:id="rId64"/>
+    <p:sldId id="303" r:id="rId59"/>
+    <p:sldId id="304" r:id="rId60"/>
+    <p:sldId id="305" r:id="rId61"/>
+    <p:sldId id="306" r:id="rId62"/>
+    <p:sldId id="307" r:id="rId63"/>
   </p:sldIdLst>
   <p:sldSz cx="12192000" cy="6858000"/>
   <p:notesSz cx="6858000" cy="9144000"/>
@@ -259,7 +258,7 @@
           <a:p>
             <a:fld id="{D2867A0E-DA56-0A4B-83A5-F520947CDB62}" type="datetimeFigureOut">
               <a:rPr lang="en-US" smtClean="0"/>
-              <a:t>9/21/25</a:t>
+              <a:t>9/11/26</a:t>
             </a:fld>
             <a:endParaRPr lang="en-US"/>
           </a:p>
@@ -3077,9 +3076,9 @@
       </p:grpSpPr>
       <p:sp>
         <p:nvSpPr>
-          <p:cNvPr id="60418" name="Slide Image Placeholder 1"/>
+          <p:cNvPr id="39938" name="Slide Image Placeholder 1"/>
           <p:cNvSpPr>
-            <a:spLocks noGrp="1" noRot="1" noChangeAspect="1" noChangeArrowheads="1" noTextEdit="1"/>
+            <a:spLocks noGrp="1" noRot="1" noChangeAspect="1" noTextEdit="1"/>
           </p:cNvSpPr>
           <p:nvPr>
             <p:ph type="sldImg"/>
@@ -3091,7 +3090,7 @@
       </p:sp>
       <p:sp>
         <p:nvSpPr>
-          <p:cNvPr id="99330" name="Notes Placeholder 2"/>
+          <p:cNvPr id="101378" name="Notes Placeholder 2"/>
           <p:cNvSpPr>
             <a:spLocks noGrp="1"/>
           </p:cNvSpPr>
@@ -3137,7 +3136,7 @@
     </p:spTree>
     <p:extLst>
       <p:ext uri="{BB962C8B-B14F-4D97-AF65-F5344CB8AC3E}">
-        <p14:creationId xmlns:p14="http://schemas.microsoft.com/office/powerpoint/2010/main" val="632755733"/>
+        <p14:creationId xmlns:p14="http://schemas.microsoft.com/office/powerpoint/2010/main" val="295483474"/>
       </p:ext>
     </p:extLst>
   </p:cSld>
@@ -3166,7 +3165,7 @@
       </p:grpSpPr>
       <p:sp>
         <p:nvSpPr>
-          <p:cNvPr id="39938" name="Slide Image Placeholder 1"/>
+          <p:cNvPr id="41986" name="Slide Image Placeholder 1"/>
           <p:cNvSpPr>
             <a:spLocks noGrp="1" noRot="1" noChangeAspect="1" noTextEdit="1"/>
           </p:cNvSpPr>
@@ -3180,7 +3179,7 @@
       </p:sp>
       <p:sp>
         <p:nvSpPr>
-          <p:cNvPr id="101378" name="Notes Placeholder 2"/>
+          <p:cNvPr id="103426" name="Notes Placeholder 2"/>
           <p:cNvSpPr>
             <a:spLocks noGrp="1"/>
           </p:cNvSpPr>
@@ -3226,7 +3225,7 @@
     </p:spTree>
     <p:extLst>
       <p:ext uri="{BB962C8B-B14F-4D97-AF65-F5344CB8AC3E}">
-        <p14:creationId xmlns:p14="http://schemas.microsoft.com/office/powerpoint/2010/main" val="295483474"/>
+        <p14:creationId xmlns:p14="http://schemas.microsoft.com/office/powerpoint/2010/main" val="152719972"/>
       </p:ext>
     </p:extLst>
   </p:cSld>
@@ -3255,7 +3254,7 @@
       </p:grpSpPr>
       <p:sp>
         <p:nvSpPr>
-          <p:cNvPr id="41986" name="Slide Image Placeholder 1"/>
+          <p:cNvPr id="44034" name="Slide Image Placeholder 1"/>
           <p:cNvSpPr>
             <a:spLocks noGrp="1" noRot="1" noChangeAspect="1" noTextEdit="1"/>
           </p:cNvSpPr>
@@ -3269,7 +3268,7 @@
       </p:sp>
       <p:sp>
         <p:nvSpPr>
-          <p:cNvPr id="103426" name="Notes Placeholder 2"/>
+          <p:cNvPr id="105474" name="Notes Placeholder 2"/>
           <p:cNvSpPr>
             <a:spLocks noGrp="1"/>
           </p:cNvSpPr>
@@ -3315,7 +3314,7 @@
     </p:spTree>
     <p:extLst>
       <p:ext uri="{BB962C8B-B14F-4D97-AF65-F5344CB8AC3E}">
-        <p14:creationId xmlns:p14="http://schemas.microsoft.com/office/powerpoint/2010/main" val="152719972"/>
+        <p14:creationId xmlns:p14="http://schemas.microsoft.com/office/powerpoint/2010/main" val="1491514610"/>
       </p:ext>
     </p:extLst>
   </p:cSld>
@@ -3344,9 +3343,9 @@
       </p:grpSpPr>
       <p:sp>
         <p:nvSpPr>
-          <p:cNvPr id="44034" name="Slide Image Placeholder 1"/>
+          <p:cNvPr id="46082" name="Slide Image Placeholder 1"/>
           <p:cNvSpPr>
-            <a:spLocks noGrp="1" noRot="1" noChangeAspect="1" noTextEdit="1"/>
+            <a:spLocks noGrp="1" noRot="1" noChangeAspect="1" noChangeArrowheads="1" noTextEdit="1"/>
           </p:cNvSpPr>
           <p:nvPr>
             <p:ph type="sldImg"/>
@@ -3358,7 +3357,7 @@
       </p:sp>
       <p:sp>
         <p:nvSpPr>
-          <p:cNvPr id="105474" name="Notes Placeholder 2"/>
+          <p:cNvPr id="107522" name="Notes Placeholder 2"/>
           <p:cNvSpPr>
             <a:spLocks noGrp="1"/>
           </p:cNvSpPr>
@@ -3404,7 +3403,7 @@
     </p:spTree>
     <p:extLst>
       <p:ext uri="{BB962C8B-B14F-4D97-AF65-F5344CB8AC3E}">
-        <p14:creationId xmlns:p14="http://schemas.microsoft.com/office/powerpoint/2010/main" val="1491514610"/>
+        <p14:creationId xmlns:p14="http://schemas.microsoft.com/office/powerpoint/2010/main" val="279816882"/>
       </p:ext>
     </p:extLst>
   </p:cSld>
@@ -3433,9 +3432,9 @@
       </p:grpSpPr>
       <p:sp>
         <p:nvSpPr>
-          <p:cNvPr id="46082" name="Slide Image Placeholder 1"/>
+          <p:cNvPr id="48130" name="Slide Image Placeholder 1"/>
           <p:cNvSpPr>
-            <a:spLocks noGrp="1" noRot="1" noChangeAspect="1" noChangeArrowheads="1" noTextEdit="1"/>
+            <a:spLocks noGrp="1" noRot="1" noChangeAspect="1" noTextEdit="1"/>
           </p:cNvSpPr>
           <p:nvPr>
             <p:ph type="sldImg"/>
@@ -3447,7 +3446,7 @@
       </p:sp>
       <p:sp>
         <p:nvSpPr>
-          <p:cNvPr id="107522" name="Notes Placeholder 2"/>
+          <p:cNvPr id="109570" name="Notes Placeholder 2"/>
           <p:cNvSpPr>
             <a:spLocks noGrp="1"/>
           </p:cNvSpPr>
@@ -3493,7 +3492,7 @@
     </p:spTree>
     <p:extLst>
       <p:ext uri="{BB962C8B-B14F-4D97-AF65-F5344CB8AC3E}">
-        <p14:creationId xmlns:p14="http://schemas.microsoft.com/office/powerpoint/2010/main" val="279816882"/>
+        <p14:creationId xmlns:p14="http://schemas.microsoft.com/office/powerpoint/2010/main" val="33064505"/>
       </p:ext>
     </p:extLst>
   </p:cSld>
@@ -3583,95 +3582,6 @@
     <p:extLst>
       <p:ext uri="{BB962C8B-B14F-4D97-AF65-F5344CB8AC3E}">
         <p14:creationId xmlns:p14="http://schemas.microsoft.com/office/powerpoint/2010/main" val="622826910"/>
-      </p:ext>
-    </p:extLst>
-  </p:cSld>
-  <p:clrMapOvr>
-    <a:masterClrMapping/>
-  </p:clrMapOvr>
-</p:notes>
-</file>
-
-<file path=ppt/notesSlides/notesSlide40.xml><?xml version="1.0" encoding="utf-8"?>
-<p:notes xmlns:a="http://schemas.openxmlformats.org/drawingml/2006/main" xmlns:r="http://schemas.openxmlformats.org/officeDocument/2006/relationships" xmlns:p="http://schemas.openxmlformats.org/presentationml/2006/main">
-  <p:cSld>
-    <p:spTree>
-      <p:nvGrpSpPr>
-        <p:cNvPr id="1" name=""/>
-        <p:cNvGrpSpPr/>
-        <p:nvPr/>
-      </p:nvGrpSpPr>
-      <p:grpSpPr>
-        <a:xfrm>
-          <a:off x="0" y="0"/>
-          <a:ext cx="0" cy="0"/>
-          <a:chOff x="0" y="0"/>
-          <a:chExt cx="0" cy="0"/>
-        </a:xfrm>
-      </p:grpSpPr>
-      <p:sp>
-        <p:nvSpPr>
-          <p:cNvPr id="48130" name="Slide Image Placeholder 1"/>
-          <p:cNvSpPr>
-            <a:spLocks noGrp="1" noRot="1" noChangeAspect="1" noTextEdit="1"/>
-          </p:cNvSpPr>
-          <p:nvPr>
-            <p:ph type="sldImg"/>
-          </p:nvPr>
-        </p:nvSpPr>
-        <p:spPr>
-          <a:ln/>
-        </p:spPr>
-      </p:sp>
-      <p:sp>
-        <p:nvSpPr>
-          <p:cNvPr id="109570" name="Notes Placeholder 2"/>
-          <p:cNvSpPr>
-            <a:spLocks noGrp="1"/>
-          </p:cNvSpPr>
-          <p:nvPr>
-            <p:ph type="body" idx="1"/>
-          </p:nvPr>
-        </p:nvSpPr>
-        <p:spPr>
-          <a:noFill/>
-          <a:extLst>
-            <a:ext uri="{909E8E84-426E-40DD-AFC4-6F175D3DCCD1}">
-              <a14:hiddenFill xmlns:a14="http://schemas.microsoft.com/office/drawing/2010/main">
-                <a:solidFill>
-                  <a:srgbClr val="FFFFFF"/>
-                </a:solidFill>
-              </a14:hiddenFill>
-            </a:ext>
-            <a:ext uri="{91240B29-F687-4F45-9708-019B960494DF}">
-              <a14:hiddenLine xmlns:a14="http://schemas.microsoft.com/office/drawing/2010/main" w="9525">
-                <a:solidFill>
-                  <a:srgbClr val="000000"/>
-                </a:solidFill>
-                <a:miter lim="800000"/>
-                <a:headEnd/>
-                <a:tailEnd/>
-              </a14:hiddenLine>
-            </a:ext>
-            <a:ext uri="{FAA26D3D-D897-4be2-8F04-BA451C77F1D7}">
-              <ma14:placeholderFlag xmlns:ma14="http://schemas.microsoft.com/office/mac/drawingml/2011/main" xmlns="" val="1"/>
-            </a:ext>
-          </a:extLst>
-        </p:spPr>
-        <p:txBody>
-          <a:bodyPr/>
-          <a:lstStyle/>
-          <a:p>
-            <a:endParaRPr lang="en-US" altLang="en-US">
-              <a:latin typeface="Times New Roman" charset="0"/>
-            </a:endParaRPr>
-          </a:p>
-        </p:txBody>
-      </p:sp>
-    </p:spTree>
-    <p:extLst>
-      <p:ext uri="{BB962C8B-B14F-4D97-AF65-F5344CB8AC3E}">
-        <p14:creationId xmlns:p14="http://schemas.microsoft.com/office/powerpoint/2010/main" val="33064505"/>
       </p:ext>
     </p:extLst>
   </p:cSld>
@@ -4255,7 +4165,7 @@
           <a:p>
             <a:fld id="{6A7D9F0D-27CC-AF49-BE27-075EF3FD3399}" type="datetimeFigureOut">
               <a:rPr lang="en-US" smtClean="0"/>
-              <a:t>9/21/25</a:t>
+              <a:t>9/11/26</a:t>
             </a:fld>
             <a:endParaRPr lang="en-US"/>
           </a:p>
@@ -4423,7 +4333,7 @@
           <a:p>
             <a:fld id="{6A7D9F0D-27CC-AF49-BE27-075EF3FD3399}" type="datetimeFigureOut">
               <a:rPr lang="en-US" smtClean="0"/>
-              <a:t>9/21/25</a:t>
+              <a:t>9/11/26</a:t>
             </a:fld>
             <a:endParaRPr lang="en-US"/>
           </a:p>
@@ -4601,7 +4511,7 @@
           <a:p>
             <a:fld id="{6A7D9F0D-27CC-AF49-BE27-075EF3FD3399}" type="datetimeFigureOut">
               <a:rPr lang="en-US" smtClean="0"/>
-              <a:t>9/21/25</a:t>
+              <a:t>9/11/26</a:t>
             </a:fld>
             <a:endParaRPr lang="en-US"/>
           </a:p>
@@ -5672,7 +5582,7 @@
           <a:p>
             <a:fld id="{6A7D9F0D-27CC-AF49-BE27-075EF3FD3399}" type="datetimeFigureOut">
               <a:rPr lang="en-US" smtClean="0"/>
-              <a:t>9/21/25</a:t>
+              <a:t>9/11/26</a:t>
             </a:fld>
             <a:endParaRPr lang="en-US"/>
           </a:p>
@@ -5917,7 +5827,7 @@
           <a:p>
             <a:fld id="{6A7D9F0D-27CC-AF49-BE27-075EF3FD3399}" type="datetimeFigureOut">
               <a:rPr lang="en-US" smtClean="0"/>
-              <a:t>9/21/25</a:t>
+              <a:t>9/11/26</a:t>
             </a:fld>
             <a:endParaRPr lang="en-US"/>
           </a:p>
@@ -6146,7 +6056,7 @@
           <a:p>
             <a:fld id="{6A7D9F0D-27CC-AF49-BE27-075EF3FD3399}" type="datetimeFigureOut">
               <a:rPr lang="en-US" smtClean="0"/>
-              <a:t>9/21/25</a:t>
+              <a:t>9/11/26</a:t>
             </a:fld>
             <a:endParaRPr lang="en-US"/>
           </a:p>
@@ -6510,7 +6420,7 @@
           <a:p>
             <a:fld id="{6A7D9F0D-27CC-AF49-BE27-075EF3FD3399}" type="datetimeFigureOut">
               <a:rPr lang="en-US" smtClean="0"/>
-              <a:t>9/21/25</a:t>
+              <a:t>9/11/26</a:t>
             </a:fld>
             <a:endParaRPr lang="en-US"/>
           </a:p>
@@ -6627,7 +6537,7 @@
           <a:p>
             <a:fld id="{6A7D9F0D-27CC-AF49-BE27-075EF3FD3399}" type="datetimeFigureOut">
               <a:rPr lang="en-US" smtClean="0"/>
-              <a:t>9/21/25</a:t>
+              <a:t>9/11/26</a:t>
             </a:fld>
             <a:endParaRPr lang="en-US"/>
           </a:p>
@@ -6722,7 +6632,7 @@
           <a:p>
             <a:fld id="{6A7D9F0D-27CC-AF49-BE27-075EF3FD3399}" type="datetimeFigureOut">
               <a:rPr lang="en-US" smtClean="0"/>
-              <a:t>9/21/25</a:t>
+              <a:t>9/11/26</a:t>
             </a:fld>
             <a:endParaRPr lang="en-US"/>
           </a:p>
@@ -6997,7 +6907,7 @@
           <a:p>
             <a:fld id="{6A7D9F0D-27CC-AF49-BE27-075EF3FD3399}" type="datetimeFigureOut">
               <a:rPr lang="en-US" smtClean="0"/>
-              <a:t>9/21/25</a:t>
+              <a:t>9/11/26</a:t>
             </a:fld>
             <a:endParaRPr lang="en-US"/>
           </a:p>
@@ -7249,7 +7159,7 @@
           <a:p>
             <a:fld id="{6A7D9F0D-27CC-AF49-BE27-075EF3FD3399}" type="datetimeFigureOut">
               <a:rPr lang="en-US" smtClean="0"/>
-              <a:t>9/21/25</a:t>
+              <a:t>9/11/26</a:t>
             </a:fld>
             <a:endParaRPr lang="en-US"/>
           </a:p>
@@ -7460,7 +7370,7 @@
           <a:p>
             <a:fld id="{6A7D9F0D-27CC-AF49-BE27-075EF3FD3399}" type="datetimeFigureOut">
               <a:rPr lang="en-US" smtClean="0"/>
-              <a:t>9/21/25</a:t>
+              <a:t>9/11/26</a:t>
             </a:fld>
             <a:endParaRPr lang="en-US"/>
           </a:p>
@@ -22595,7 +22505,7 @@
             <a:pPr eaLnBrk="1" hangingPunct="1">
               <a:defRPr/>
             </a:pPr>
-            <a:endParaRPr lang="en-US" altLang="en-US" sz="2400">
+            <a:endParaRPr lang="en-US" altLang="en-US" sz="2400" dirty="0">
               <a:solidFill>
                 <a:schemeClr val="hlink"/>
               </a:solidFill>
@@ -22605,7 +22515,7 @@
             <a:pPr eaLnBrk="1" hangingPunct="1">
               <a:defRPr/>
             </a:pPr>
-            <a:endParaRPr lang="en-US" altLang="en-US" sz="2400">
+            <a:endParaRPr lang="en-US" altLang="en-US" sz="2400" dirty="0">
               <a:solidFill>
                 <a:schemeClr val="hlink"/>
               </a:solidFill>
@@ -22616,7 +22526,7 @@
               <a:defRPr/>
             </a:pPr>
             <a:r>
-              <a:rPr lang="en-US" altLang="en-US" sz="2400">
+              <a:rPr lang="en-US" altLang="en-US" sz="2400" dirty="0">
                 <a:solidFill>
                   <a:schemeClr val="hlink"/>
                 </a:solidFill>
@@ -22624,7 +22534,7 @@
               <a:t>random</a:t>
             </a:r>
             <a:r>
-              <a:rPr lang="en-US" altLang="en-US" sz="2400"/>
+              <a:rPr lang="en-US" altLang="en-US" sz="2400" dirty="0"/>
               <a:t>: “random=c(rnd1 ~ var1, rnd1 ~ 1)”. Leaving out a “random” specification implies all fixed effects have an associated random effect.</a:t>
             </a:r>
           </a:p>
@@ -22633,7 +22543,7 @@
               <a:defRPr/>
             </a:pPr>
             <a:r>
-              <a:rPr lang="en-US" altLang="en-US" sz="2400">
+              <a:rPr lang="en-US" altLang="en-US" sz="2400" dirty="0">
                 <a:solidFill>
                   <a:schemeClr val="hlink"/>
                 </a:solidFill>
@@ -22641,7 +22551,7 @@
               <a:t>start</a:t>
             </a:r>
             <a:r>
-              <a:rPr lang="en-US" altLang="en-US" sz="2400"/>
+              <a:rPr lang="en-US" altLang="en-US" sz="2400" dirty="0"/>
               <a:t>: “start = c(fix1=x1,fix2=x2,..)” – the initial values for the fixed parameters of the model.</a:t>
             </a:r>
           </a:p>
@@ -22649,28 +22559,19 @@
             <a:pPr eaLnBrk="1" hangingPunct="1">
               <a:defRPr/>
             </a:pPr>
-            <a:endParaRPr lang="en-US" altLang="en-US" sz="2400"/>
+            <a:endParaRPr lang="en-US" altLang="en-US" sz="2400" dirty="0"/>
           </a:p>
           <a:p>
             <a:pPr eaLnBrk="1" hangingPunct="1">
               <a:defRPr/>
             </a:pPr>
-            <a:r>
-              <a:rPr lang="en-US" altLang="en-US" sz="2400"/>
-              <a:t>Be wary of using NLME to make predictions when some of the parameters are non-linear.</a:t>
-            </a:r>
+            <a:endParaRPr lang="en-US" altLang="en-US" sz="2400" dirty="0"/>
           </a:p>
           <a:p>
             <a:pPr eaLnBrk="1" hangingPunct="1">
               <a:defRPr/>
             </a:pPr>
-            <a:endParaRPr lang="en-US" altLang="en-US" sz="2400"/>
-          </a:p>
-          <a:p>
-            <a:pPr eaLnBrk="1" hangingPunct="1">
-              <a:defRPr/>
-            </a:pPr>
-            <a:endParaRPr lang="en-US" altLang="en-US" sz="3600"/>
+            <a:endParaRPr lang="en-US" altLang="en-US" sz="3600" dirty="0"/>
           </a:p>
         </p:txBody>
       </p:sp>
@@ -22949,7 +22850,7 @@
       </p:grpSpPr>
       <p:sp>
         <p:nvSpPr>
-          <p:cNvPr id="59394" name="Rectangle 2"/>
+          <p:cNvPr id="38914" name="Rectangle 6"/>
           <p:cNvSpPr>
             <a:spLocks noGrp="1" noChangeArrowheads="1"/>
           </p:cNvSpPr>
@@ -22966,79 +22867,22 @@
               <a:defRPr/>
             </a:pPr>
             <a:r>
-              <a:rPr lang="en-US" altLang="en-US"/>
-              <a:t>The NLME Function-III</a:t>
-            </a:r>
-            <a:endParaRPr lang="en-AU" altLang="en-US"/>
+              <a:rPr lang="en-US" altLang="en-US" sz="4000"/>
+              <a:t>Fitting Length and Age Data</a:t>
+            </a:r>
+            <a:br>
+              <a:rPr lang="en-US" altLang="en-US" sz="4000"/>
+            </a:br>
+            <a:r>
+              <a:rPr lang="en-US" altLang="en-US" sz="4000"/>
+              <a:t>(Non-linear mixed model-I)</a:t>
+            </a:r>
           </a:p>
         </p:txBody>
       </p:sp>
       <p:sp>
         <p:nvSpPr>
-          <p:cNvPr id="59395" name="Rectangle 3"/>
-          <p:cNvSpPr>
-            <a:spLocks noGrp="1" noChangeArrowheads="1"/>
-          </p:cNvSpPr>
-          <p:nvPr>
-            <p:ph type="body" idx="1"/>
-          </p:nvPr>
-        </p:nvSpPr>
-        <p:spPr>
-          <a:xfrm>
-            <a:off x="2743200" y="3657601"/>
-            <a:ext cx="3124200" cy="2474913"/>
-          </a:xfrm>
-        </p:spPr>
-        <p:txBody>
-          <a:bodyPr/>
-          <a:lstStyle/>
-          <a:p>
-            <a:pPr eaLnBrk="1" hangingPunct="1">
-              <a:defRPr/>
-            </a:pPr>
-            <a:r>
-              <a:rPr lang="en-AU" altLang="en-US"/>
-              <a:t>update</a:t>
-            </a:r>
-          </a:p>
-          <a:p>
-            <a:pPr eaLnBrk="1" hangingPunct="1">
-              <a:defRPr/>
-            </a:pPr>
-            <a:r>
-              <a:rPr lang="en-AU" altLang="en-US"/>
-              <a:t>logLik</a:t>
-            </a:r>
-          </a:p>
-          <a:p>
-            <a:pPr eaLnBrk="1" hangingPunct="1">
-              <a:defRPr/>
-            </a:pPr>
-            <a:r>
-              <a:rPr lang="en-AU" altLang="en-US"/>
-              <a:t>plot</a:t>
-            </a:r>
-          </a:p>
-          <a:p>
-            <a:pPr eaLnBrk="1" hangingPunct="1">
-              <a:defRPr/>
-            </a:pPr>
-            <a:r>
-              <a:rPr lang="en-AU" altLang="en-US"/>
-              <a:t>predict</a:t>
-            </a:r>
-          </a:p>
-          <a:p>
-            <a:pPr eaLnBrk="1" hangingPunct="1">
-              <a:defRPr/>
-            </a:pPr>
-            <a:endParaRPr lang="en-AU" altLang="en-US"/>
-          </a:p>
-        </p:txBody>
-      </p:sp>
-      <p:sp>
-        <p:nvSpPr>
-          <p:cNvPr id="98307" name="Rectangle 4"/>
+          <p:cNvPr id="100354" name="Rectangle 8"/>
           <p:cNvSpPr>
             <a:spLocks noChangeArrowheads="1"/>
           </p:cNvSpPr>
@@ -23046,8 +22890,8 @@
         </p:nvSpPr>
         <p:spPr bwMode="auto">
           <a:xfrm>
-            <a:off x="2057401" y="2209801"/>
-            <a:ext cx="8352799" cy="904863"/>
+            <a:off x="2057400" y="2133600"/>
+            <a:ext cx="8420895" cy="603242"/>
           </a:xfrm>
           <a:prstGeom prst="rect">
             <a:avLst/>
@@ -23249,545 +23093,6 @@
           </a:lstStyle>
           <a:p>
             <a:pPr eaLnBrk="1" hangingPunct="1">
-              <a:buFont typeface="Wingdings" charset="2"/>
-              <a:buNone/>
-            </a:pPr>
-            <a:r>
-              <a:rPr lang="en-AU" altLang="en-US" sz="2400"/>
-              <a:t>You can use many of the functions defined for linear models</a:t>
-            </a:r>
-          </a:p>
-          <a:p>
-            <a:pPr eaLnBrk="1" hangingPunct="1">
-              <a:buFont typeface="Wingdings" charset="2"/>
-              <a:buNone/>
-            </a:pPr>
-            <a:r>
-              <a:rPr lang="en-AU" altLang="en-US" sz="2400"/>
-              <a:t> with nlme, e.g.:</a:t>
-            </a:r>
-          </a:p>
-        </p:txBody>
-      </p:sp>
-      <p:sp>
-        <p:nvSpPr>
-          <p:cNvPr id="98308" name="Rectangle 5"/>
-          <p:cNvSpPr>
-            <a:spLocks noChangeArrowheads="1"/>
-          </p:cNvSpPr>
-          <p:nvPr/>
-        </p:nvSpPr>
-        <p:spPr bwMode="auto">
-          <a:xfrm>
-            <a:off x="6629400" y="3657601"/>
-            <a:ext cx="3124200" cy="2474913"/>
-          </a:xfrm>
-          <a:prstGeom prst="rect">
-            <a:avLst/>
-          </a:prstGeom>
-          <a:noFill/>
-          <a:ln>
-            <a:noFill/>
-          </a:ln>
-          <a:extLst>
-            <a:ext uri="{909E8E84-426E-40DD-AFC4-6F175D3DCCD1}">
-              <a14:hiddenFill xmlns:a14="http://schemas.microsoft.com/office/drawing/2010/main">
-                <a:solidFill>
-                  <a:srgbClr val="FFFFFF"/>
-                </a:solidFill>
-              </a14:hiddenFill>
-            </a:ext>
-            <a:ext uri="{91240B29-F687-4F45-9708-019B960494DF}">
-              <a14:hiddenLine xmlns:a14="http://schemas.microsoft.com/office/drawing/2010/main" w="9525">
-                <a:solidFill>
-                  <a:srgbClr val="000000"/>
-                </a:solidFill>
-                <a:miter lim="800000"/>
-                <a:headEnd/>
-                <a:tailEnd/>
-              </a14:hiddenLine>
-            </a:ext>
-          </a:extLst>
-        </p:spPr>
-        <p:txBody>
-          <a:bodyPr/>
-          <a:lstStyle>
-            <a:lvl1pPr marL="342900" indent="-342900">
-              <a:spcBef>
-                <a:spcPct val="20000"/>
-              </a:spcBef>
-              <a:buClr>
-                <a:schemeClr val="folHlink"/>
-              </a:buClr>
-              <a:buSzPct val="60000"/>
-              <a:buFont typeface="Wingdings" charset="2"/>
-              <a:buChar char="n"/>
-              <a:defRPr sz="3200">
-                <a:solidFill>
-                  <a:schemeClr val="tx1"/>
-                </a:solidFill>
-                <a:latin typeface="Tahoma" charset="0"/>
-              </a:defRPr>
-            </a:lvl1pPr>
-            <a:lvl2pPr marL="742950" indent="-285750">
-              <a:spcBef>
-                <a:spcPct val="20000"/>
-              </a:spcBef>
-              <a:buClr>
-                <a:schemeClr val="hlink"/>
-              </a:buClr>
-              <a:buSzPct val="55000"/>
-              <a:buFont typeface="Wingdings" charset="2"/>
-              <a:buChar char="n"/>
-              <a:defRPr sz="2800">
-                <a:solidFill>
-                  <a:schemeClr val="tx1"/>
-                </a:solidFill>
-                <a:latin typeface="Tahoma" charset="0"/>
-              </a:defRPr>
-            </a:lvl2pPr>
-            <a:lvl3pPr marL="1143000" indent="-228600">
-              <a:spcBef>
-                <a:spcPct val="20000"/>
-              </a:spcBef>
-              <a:buClr>
-                <a:schemeClr val="folHlink"/>
-              </a:buClr>
-              <a:buSzPct val="50000"/>
-              <a:buFont typeface="Wingdings" charset="2"/>
-              <a:buChar char="n"/>
-              <a:defRPr sz="2400">
-                <a:solidFill>
-                  <a:schemeClr val="tx1"/>
-                </a:solidFill>
-                <a:latin typeface="Tahoma" charset="0"/>
-              </a:defRPr>
-            </a:lvl3pPr>
-            <a:lvl4pPr marL="1600200" indent="-228600">
-              <a:spcBef>
-                <a:spcPct val="20000"/>
-              </a:spcBef>
-              <a:buClr>
-                <a:schemeClr val="accent2"/>
-              </a:buClr>
-              <a:buSzPct val="55000"/>
-              <a:buFont typeface="Wingdings" charset="2"/>
-              <a:buChar char="n"/>
-              <a:defRPr sz="2000">
-                <a:solidFill>
-                  <a:schemeClr val="tx1"/>
-                </a:solidFill>
-                <a:latin typeface="Tahoma" charset="0"/>
-              </a:defRPr>
-            </a:lvl4pPr>
-            <a:lvl5pPr marL="2057400" indent="-228600">
-              <a:spcBef>
-                <a:spcPct val="20000"/>
-              </a:spcBef>
-              <a:buClr>
-                <a:schemeClr val="accent1"/>
-              </a:buClr>
-              <a:buSzPct val="50000"/>
-              <a:buFont typeface="Wingdings" charset="2"/>
-              <a:buChar char="n"/>
-              <a:defRPr sz="2000">
-                <a:solidFill>
-                  <a:schemeClr val="tx1"/>
-                </a:solidFill>
-                <a:latin typeface="Tahoma" charset="0"/>
-              </a:defRPr>
-            </a:lvl5pPr>
-            <a:lvl6pPr marL="2514600" indent="-228600" eaLnBrk="0" fontAlgn="base" hangingPunct="0">
-              <a:spcBef>
-                <a:spcPct val="20000"/>
-              </a:spcBef>
-              <a:spcAft>
-                <a:spcPct val="0"/>
-              </a:spcAft>
-              <a:buClr>
-                <a:schemeClr val="accent1"/>
-              </a:buClr>
-              <a:buSzPct val="50000"/>
-              <a:buFont typeface="Wingdings" charset="2"/>
-              <a:buChar char="n"/>
-              <a:defRPr sz="2000">
-                <a:solidFill>
-                  <a:schemeClr val="tx1"/>
-                </a:solidFill>
-                <a:latin typeface="Tahoma" charset="0"/>
-              </a:defRPr>
-            </a:lvl6pPr>
-            <a:lvl7pPr marL="2971800" indent="-228600" eaLnBrk="0" fontAlgn="base" hangingPunct="0">
-              <a:spcBef>
-                <a:spcPct val="20000"/>
-              </a:spcBef>
-              <a:spcAft>
-                <a:spcPct val="0"/>
-              </a:spcAft>
-              <a:buClr>
-                <a:schemeClr val="accent1"/>
-              </a:buClr>
-              <a:buSzPct val="50000"/>
-              <a:buFont typeface="Wingdings" charset="2"/>
-              <a:buChar char="n"/>
-              <a:defRPr sz="2000">
-                <a:solidFill>
-                  <a:schemeClr val="tx1"/>
-                </a:solidFill>
-                <a:latin typeface="Tahoma" charset="0"/>
-              </a:defRPr>
-            </a:lvl7pPr>
-            <a:lvl8pPr marL="3429000" indent="-228600" eaLnBrk="0" fontAlgn="base" hangingPunct="0">
-              <a:spcBef>
-                <a:spcPct val="20000"/>
-              </a:spcBef>
-              <a:spcAft>
-                <a:spcPct val="0"/>
-              </a:spcAft>
-              <a:buClr>
-                <a:schemeClr val="accent1"/>
-              </a:buClr>
-              <a:buSzPct val="50000"/>
-              <a:buFont typeface="Wingdings" charset="2"/>
-              <a:buChar char="n"/>
-              <a:defRPr sz="2000">
-                <a:solidFill>
-                  <a:schemeClr val="tx1"/>
-                </a:solidFill>
-                <a:latin typeface="Tahoma" charset="0"/>
-              </a:defRPr>
-            </a:lvl8pPr>
-            <a:lvl9pPr marL="3886200" indent="-228600" eaLnBrk="0" fontAlgn="base" hangingPunct="0">
-              <a:spcBef>
-                <a:spcPct val="20000"/>
-              </a:spcBef>
-              <a:spcAft>
-                <a:spcPct val="0"/>
-              </a:spcAft>
-              <a:buClr>
-                <a:schemeClr val="accent1"/>
-              </a:buClr>
-              <a:buSzPct val="50000"/>
-              <a:buFont typeface="Wingdings" charset="2"/>
-              <a:buChar char="n"/>
-              <a:defRPr sz="2000">
-                <a:solidFill>
-                  <a:schemeClr val="tx1"/>
-                </a:solidFill>
-                <a:latin typeface="Tahoma" charset="0"/>
-              </a:defRPr>
-            </a:lvl9pPr>
-          </a:lstStyle>
-          <a:p>
-            <a:pPr eaLnBrk="1" hangingPunct="1">
-              <a:lnSpc>
-                <a:spcPct val="90000"/>
-              </a:lnSpc>
-            </a:pPr>
-            <a:r>
-              <a:rPr lang="en-AU" altLang="en-US" sz="2800"/>
-              <a:t>intervals</a:t>
-            </a:r>
-          </a:p>
-          <a:p>
-            <a:pPr eaLnBrk="1" hangingPunct="1">
-              <a:lnSpc>
-                <a:spcPct val="90000"/>
-              </a:lnSpc>
-            </a:pPr>
-            <a:r>
-              <a:rPr lang="en-AU" altLang="en-US" sz="2800"/>
-              <a:t>anova</a:t>
-            </a:r>
-          </a:p>
-          <a:p>
-            <a:pPr eaLnBrk="1" hangingPunct="1">
-              <a:lnSpc>
-                <a:spcPct val="90000"/>
-              </a:lnSpc>
-            </a:pPr>
-            <a:r>
-              <a:rPr lang="en-AU" altLang="en-US" sz="2800"/>
-              <a:t>residuals</a:t>
-            </a:r>
-          </a:p>
-        </p:txBody>
-      </p:sp>
-    </p:spTree>
-    <p:extLst>
-      <p:ext uri="{BB962C8B-B14F-4D97-AF65-F5344CB8AC3E}">
-        <p14:creationId xmlns:p14="http://schemas.microsoft.com/office/powerpoint/2010/main" val="2013231695"/>
-      </p:ext>
-    </p:extLst>
-  </p:cSld>
-  <p:clrMapOvr>
-    <a:masterClrMapping/>
-  </p:clrMapOvr>
-</p:sld>
-</file>
-
-<file path=ppt/slides/slide59.xml><?xml version="1.0" encoding="utf-8"?>
-<p:sld xmlns:a="http://schemas.openxmlformats.org/drawingml/2006/main" xmlns:r="http://schemas.openxmlformats.org/officeDocument/2006/relationships" xmlns:p="http://schemas.openxmlformats.org/presentationml/2006/main">
-  <p:cSld>
-    <p:spTree>
-      <p:nvGrpSpPr>
-        <p:cNvPr id="1" name=""/>
-        <p:cNvGrpSpPr/>
-        <p:nvPr/>
-      </p:nvGrpSpPr>
-      <p:grpSpPr>
-        <a:xfrm>
-          <a:off x="0" y="0"/>
-          <a:ext cx="0" cy="0"/>
-          <a:chOff x="0" y="0"/>
-          <a:chExt cx="0" cy="0"/>
-        </a:xfrm>
-      </p:grpSpPr>
-      <p:sp>
-        <p:nvSpPr>
-          <p:cNvPr id="38914" name="Rectangle 6"/>
-          <p:cNvSpPr>
-            <a:spLocks noGrp="1" noChangeArrowheads="1"/>
-          </p:cNvSpPr>
-          <p:nvPr>
-            <p:ph type="title"/>
-          </p:nvPr>
-        </p:nvSpPr>
-        <p:spPr/>
-        <p:txBody>
-          <a:bodyPr/>
-          <a:lstStyle/>
-          <a:p>
-            <a:pPr algn="ctr" eaLnBrk="1" hangingPunct="1">
-              <a:defRPr/>
-            </a:pPr>
-            <a:r>
-              <a:rPr lang="en-US" altLang="en-US" sz="4000"/>
-              <a:t>Fitting Length and Age Data</a:t>
-            </a:r>
-            <a:br>
-              <a:rPr lang="en-US" altLang="en-US" sz="4000"/>
-            </a:br>
-            <a:r>
-              <a:rPr lang="en-US" altLang="en-US" sz="4000"/>
-              <a:t>(Non-linear mixed model-I)</a:t>
-            </a:r>
-          </a:p>
-        </p:txBody>
-      </p:sp>
-      <p:sp>
-        <p:nvSpPr>
-          <p:cNvPr id="100354" name="Rectangle 8"/>
-          <p:cNvSpPr>
-            <a:spLocks noChangeArrowheads="1"/>
-          </p:cNvSpPr>
-          <p:nvPr/>
-        </p:nvSpPr>
-        <p:spPr bwMode="auto">
-          <a:xfrm>
-            <a:off x="2057400" y="2133600"/>
-            <a:ext cx="8421688" cy="776288"/>
-          </a:xfrm>
-          <a:prstGeom prst="rect">
-            <a:avLst/>
-          </a:prstGeom>
-          <a:noFill/>
-          <a:ln>
-            <a:noFill/>
-          </a:ln>
-          <a:extLst>
-            <a:ext uri="{909E8E84-426E-40DD-AFC4-6F175D3DCCD1}">
-              <a14:hiddenFill xmlns:a14="http://schemas.microsoft.com/office/drawing/2010/main">
-                <a:solidFill>
-                  <a:srgbClr val="FFFFFF"/>
-                </a:solidFill>
-              </a14:hiddenFill>
-            </a:ext>
-            <a:ext uri="{91240B29-F687-4F45-9708-019B960494DF}">
-              <a14:hiddenLine xmlns:a14="http://schemas.microsoft.com/office/drawing/2010/main" w="9525">
-                <a:solidFill>
-                  <a:srgbClr val="000000"/>
-                </a:solidFill>
-                <a:miter lim="800000"/>
-                <a:headEnd/>
-                <a:tailEnd/>
-              </a14:hiddenLine>
-            </a:ext>
-          </a:extLst>
-        </p:spPr>
-        <p:txBody>
-          <a:bodyPr wrap="none">
-            <a:spAutoFit/>
-          </a:bodyPr>
-          <a:lstStyle>
-            <a:lvl1pPr>
-              <a:spcBef>
-                <a:spcPct val="20000"/>
-              </a:spcBef>
-              <a:buClr>
-                <a:schemeClr val="folHlink"/>
-              </a:buClr>
-              <a:buSzPct val="60000"/>
-              <a:buFont typeface="Wingdings" charset="2"/>
-              <a:buChar char="n"/>
-              <a:defRPr sz="3200">
-                <a:solidFill>
-                  <a:schemeClr val="tx1"/>
-                </a:solidFill>
-                <a:latin typeface="Tahoma" charset="0"/>
-              </a:defRPr>
-            </a:lvl1pPr>
-            <a:lvl2pPr marL="742950" indent="-285750">
-              <a:spcBef>
-                <a:spcPct val="20000"/>
-              </a:spcBef>
-              <a:buClr>
-                <a:schemeClr val="hlink"/>
-              </a:buClr>
-              <a:buSzPct val="55000"/>
-              <a:buFont typeface="Wingdings" charset="2"/>
-              <a:buChar char="n"/>
-              <a:defRPr sz="2800">
-                <a:solidFill>
-                  <a:schemeClr val="tx1"/>
-                </a:solidFill>
-                <a:latin typeface="Tahoma" charset="0"/>
-              </a:defRPr>
-            </a:lvl2pPr>
-            <a:lvl3pPr marL="1143000" indent="-228600">
-              <a:spcBef>
-                <a:spcPct val="20000"/>
-              </a:spcBef>
-              <a:buClr>
-                <a:schemeClr val="folHlink"/>
-              </a:buClr>
-              <a:buSzPct val="50000"/>
-              <a:buFont typeface="Wingdings" charset="2"/>
-              <a:buChar char="n"/>
-              <a:defRPr sz="2400">
-                <a:solidFill>
-                  <a:schemeClr val="tx1"/>
-                </a:solidFill>
-                <a:latin typeface="Tahoma" charset="0"/>
-              </a:defRPr>
-            </a:lvl3pPr>
-            <a:lvl4pPr marL="1600200" indent="-228600">
-              <a:spcBef>
-                <a:spcPct val="20000"/>
-              </a:spcBef>
-              <a:buClr>
-                <a:schemeClr val="accent2"/>
-              </a:buClr>
-              <a:buSzPct val="55000"/>
-              <a:buFont typeface="Wingdings" charset="2"/>
-              <a:buChar char="n"/>
-              <a:defRPr sz="2000">
-                <a:solidFill>
-                  <a:schemeClr val="tx1"/>
-                </a:solidFill>
-                <a:latin typeface="Tahoma" charset="0"/>
-              </a:defRPr>
-            </a:lvl4pPr>
-            <a:lvl5pPr marL="2057400" indent="-228600">
-              <a:spcBef>
-                <a:spcPct val="20000"/>
-              </a:spcBef>
-              <a:buClr>
-                <a:schemeClr val="accent1"/>
-              </a:buClr>
-              <a:buSzPct val="50000"/>
-              <a:buFont typeface="Wingdings" charset="2"/>
-              <a:buChar char="n"/>
-              <a:defRPr sz="2000">
-                <a:solidFill>
-                  <a:schemeClr val="tx1"/>
-                </a:solidFill>
-                <a:latin typeface="Tahoma" charset="0"/>
-              </a:defRPr>
-            </a:lvl5pPr>
-            <a:lvl6pPr marL="2514600" indent="-228600" eaLnBrk="0" fontAlgn="base" hangingPunct="0">
-              <a:spcBef>
-                <a:spcPct val="20000"/>
-              </a:spcBef>
-              <a:spcAft>
-                <a:spcPct val="0"/>
-              </a:spcAft>
-              <a:buClr>
-                <a:schemeClr val="accent1"/>
-              </a:buClr>
-              <a:buSzPct val="50000"/>
-              <a:buFont typeface="Wingdings" charset="2"/>
-              <a:buChar char="n"/>
-              <a:defRPr sz="2000">
-                <a:solidFill>
-                  <a:schemeClr val="tx1"/>
-                </a:solidFill>
-                <a:latin typeface="Tahoma" charset="0"/>
-              </a:defRPr>
-            </a:lvl6pPr>
-            <a:lvl7pPr marL="2971800" indent="-228600" eaLnBrk="0" fontAlgn="base" hangingPunct="0">
-              <a:spcBef>
-                <a:spcPct val="20000"/>
-              </a:spcBef>
-              <a:spcAft>
-                <a:spcPct val="0"/>
-              </a:spcAft>
-              <a:buClr>
-                <a:schemeClr val="accent1"/>
-              </a:buClr>
-              <a:buSzPct val="50000"/>
-              <a:buFont typeface="Wingdings" charset="2"/>
-              <a:buChar char="n"/>
-              <a:defRPr sz="2000">
-                <a:solidFill>
-                  <a:schemeClr val="tx1"/>
-                </a:solidFill>
-                <a:latin typeface="Tahoma" charset="0"/>
-              </a:defRPr>
-            </a:lvl7pPr>
-            <a:lvl8pPr marL="3429000" indent="-228600" eaLnBrk="0" fontAlgn="base" hangingPunct="0">
-              <a:spcBef>
-                <a:spcPct val="20000"/>
-              </a:spcBef>
-              <a:spcAft>
-                <a:spcPct val="0"/>
-              </a:spcAft>
-              <a:buClr>
-                <a:schemeClr val="accent1"/>
-              </a:buClr>
-              <a:buSzPct val="50000"/>
-              <a:buFont typeface="Wingdings" charset="2"/>
-              <a:buChar char="n"/>
-              <a:defRPr sz="2000">
-                <a:solidFill>
-                  <a:schemeClr val="tx1"/>
-                </a:solidFill>
-                <a:latin typeface="Tahoma" charset="0"/>
-              </a:defRPr>
-            </a:lvl8pPr>
-            <a:lvl9pPr marL="3886200" indent="-228600" eaLnBrk="0" fontAlgn="base" hangingPunct="0">
-              <a:spcBef>
-                <a:spcPct val="20000"/>
-              </a:spcBef>
-              <a:spcAft>
-                <a:spcPct val="0"/>
-              </a:spcAft>
-              <a:buClr>
-                <a:schemeClr val="accent1"/>
-              </a:buClr>
-              <a:buSzPct val="50000"/>
-              <a:buFont typeface="Wingdings" charset="2"/>
-              <a:buChar char="n"/>
-              <a:defRPr sz="2000">
-                <a:solidFill>
-                  <a:schemeClr val="tx1"/>
-                </a:solidFill>
-                <a:latin typeface="Tahoma" charset="0"/>
-              </a:defRPr>
-            </a:lvl9pPr>
-          </a:lstStyle>
-          <a:p>
-            <a:pPr eaLnBrk="1" hangingPunct="1">
               <a:spcBef>
                 <a:spcPct val="0"/>
               </a:spcBef>
@@ -23861,24 +23166,6 @@
             <a:r>
               <a:rPr lang="en-US" altLang="en-US" sz="2400" dirty="0"/>
               <a:t>))</a:t>
-            </a:r>
-          </a:p>
-          <a:p>
-            <a:pPr eaLnBrk="1" hangingPunct="1">
-              <a:lnSpc>
-                <a:spcPct val="80000"/>
-              </a:lnSpc>
-              <a:spcBef>
-                <a:spcPct val="0"/>
-              </a:spcBef>
-              <a:buClrTx/>
-              <a:buSzTx/>
-              <a:buFontTx/>
-              <a:buNone/>
-            </a:pPr>
-            <a:r>
-              <a:rPr lang="en-US" altLang="en-US" sz="1400" b="1" dirty="0"/>
-              <a:t>Print(lm1$modelStruct)</a:t>
             </a:r>
           </a:p>
         </p:txBody>
@@ -24465,6 +23752,609 @@
     <p:extLst>
       <p:ext uri="{BB962C8B-B14F-4D97-AF65-F5344CB8AC3E}">
         <p14:creationId xmlns:p14="http://schemas.microsoft.com/office/powerpoint/2010/main" val="833737507"/>
+      </p:ext>
+    </p:extLst>
+  </p:cSld>
+  <p:clrMapOvr>
+    <a:masterClrMapping/>
+  </p:clrMapOvr>
+</p:sld>
+</file>
+
+<file path=ppt/slides/slide59.xml><?xml version="1.0" encoding="utf-8"?>
+<p:sld xmlns:a="http://schemas.openxmlformats.org/drawingml/2006/main" xmlns:r="http://schemas.openxmlformats.org/officeDocument/2006/relationships" xmlns:p="http://schemas.openxmlformats.org/presentationml/2006/main">
+  <p:cSld>
+    <p:spTree>
+      <p:nvGrpSpPr>
+        <p:cNvPr id="1" name=""/>
+        <p:cNvGrpSpPr/>
+        <p:nvPr/>
+      </p:nvGrpSpPr>
+      <p:grpSpPr>
+        <a:xfrm>
+          <a:off x="0" y="0"/>
+          <a:ext cx="0" cy="0"/>
+          <a:chOff x="0" y="0"/>
+          <a:chExt cx="0" cy="0"/>
+        </a:xfrm>
+      </p:grpSpPr>
+      <p:sp>
+        <p:nvSpPr>
+          <p:cNvPr id="40962" name="Rectangle 2"/>
+          <p:cNvSpPr>
+            <a:spLocks noGrp="1" noChangeArrowheads="1"/>
+          </p:cNvSpPr>
+          <p:nvPr>
+            <p:ph type="title"/>
+          </p:nvPr>
+        </p:nvSpPr>
+        <p:spPr/>
+        <p:txBody>
+          <a:bodyPr/>
+          <a:lstStyle/>
+          <a:p>
+            <a:pPr algn="ctr" eaLnBrk="1" hangingPunct="1">
+              <a:defRPr/>
+            </a:pPr>
+            <a:r>
+              <a:rPr lang="en-US" altLang="en-US" sz="4000"/>
+              <a:t>Fitting Length and Age Data</a:t>
+            </a:r>
+            <a:br>
+              <a:rPr lang="en-US" altLang="en-US" sz="4000"/>
+            </a:br>
+            <a:r>
+              <a:rPr lang="en-US" altLang="en-US" sz="4000"/>
+              <a:t>(Non-linear mixed model-II)</a:t>
+            </a:r>
+          </a:p>
+        </p:txBody>
+      </p:sp>
+      <p:sp>
+        <p:nvSpPr>
+          <p:cNvPr id="102402" name="Rectangle 6"/>
+          <p:cNvSpPr>
+            <a:spLocks noChangeArrowheads="1"/>
+          </p:cNvSpPr>
+          <p:nvPr/>
+        </p:nvSpPr>
+        <p:spPr bwMode="auto">
+          <a:xfrm>
+            <a:off x="1905000" y="2030412"/>
+            <a:ext cx="4960938" cy="396875"/>
+          </a:xfrm>
+          <a:prstGeom prst="rect">
+            <a:avLst/>
+          </a:prstGeom>
+          <a:noFill/>
+          <a:ln>
+            <a:noFill/>
+          </a:ln>
+          <a:extLst>
+            <a:ext uri="{909E8E84-426E-40DD-AFC4-6F175D3DCCD1}">
+              <a14:hiddenFill xmlns:a14="http://schemas.microsoft.com/office/drawing/2010/main">
+                <a:solidFill>
+                  <a:srgbClr val="FFFFFF"/>
+                </a:solidFill>
+              </a14:hiddenFill>
+            </a:ext>
+            <a:ext uri="{91240B29-F687-4F45-9708-019B960494DF}">
+              <a14:hiddenLine xmlns:a14="http://schemas.microsoft.com/office/drawing/2010/main" w="9525">
+                <a:solidFill>
+                  <a:srgbClr val="000000"/>
+                </a:solidFill>
+                <a:miter lim="800000"/>
+                <a:headEnd/>
+                <a:tailEnd/>
+              </a14:hiddenLine>
+            </a:ext>
+          </a:extLst>
+        </p:spPr>
+        <p:txBody>
+          <a:bodyPr wrap="none">
+            <a:spAutoFit/>
+          </a:bodyPr>
+          <a:lstStyle>
+            <a:lvl1pPr>
+              <a:spcBef>
+                <a:spcPct val="20000"/>
+              </a:spcBef>
+              <a:buClr>
+                <a:schemeClr val="folHlink"/>
+              </a:buClr>
+              <a:buSzPct val="60000"/>
+              <a:buFont typeface="Wingdings" charset="2"/>
+              <a:buChar char="n"/>
+              <a:defRPr sz="3200">
+                <a:solidFill>
+                  <a:schemeClr val="tx1"/>
+                </a:solidFill>
+                <a:latin typeface="Tahoma" charset="0"/>
+              </a:defRPr>
+            </a:lvl1pPr>
+            <a:lvl2pPr marL="742950" indent="-285750">
+              <a:spcBef>
+                <a:spcPct val="20000"/>
+              </a:spcBef>
+              <a:buClr>
+                <a:schemeClr val="hlink"/>
+              </a:buClr>
+              <a:buSzPct val="55000"/>
+              <a:buFont typeface="Wingdings" charset="2"/>
+              <a:buChar char="n"/>
+              <a:defRPr sz="2800">
+                <a:solidFill>
+                  <a:schemeClr val="tx1"/>
+                </a:solidFill>
+                <a:latin typeface="Tahoma" charset="0"/>
+              </a:defRPr>
+            </a:lvl2pPr>
+            <a:lvl3pPr marL="1143000" indent="-228600">
+              <a:spcBef>
+                <a:spcPct val="20000"/>
+              </a:spcBef>
+              <a:buClr>
+                <a:schemeClr val="folHlink"/>
+              </a:buClr>
+              <a:buSzPct val="50000"/>
+              <a:buFont typeface="Wingdings" charset="2"/>
+              <a:buChar char="n"/>
+              <a:defRPr sz="2400">
+                <a:solidFill>
+                  <a:schemeClr val="tx1"/>
+                </a:solidFill>
+                <a:latin typeface="Tahoma" charset="0"/>
+              </a:defRPr>
+            </a:lvl3pPr>
+            <a:lvl4pPr marL="1600200" indent="-228600">
+              <a:spcBef>
+                <a:spcPct val="20000"/>
+              </a:spcBef>
+              <a:buClr>
+                <a:schemeClr val="accent2"/>
+              </a:buClr>
+              <a:buSzPct val="55000"/>
+              <a:buFont typeface="Wingdings" charset="2"/>
+              <a:buChar char="n"/>
+              <a:defRPr sz="2000">
+                <a:solidFill>
+                  <a:schemeClr val="tx1"/>
+                </a:solidFill>
+                <a:latin typeface="Tahoma" charset="0"/>
+              </a:defRPr>
+            </a:lvl4pPr>
+            <a:lvl5pPr marL="2057400" indent="-228600">
+              <a:spcBef>
+                <a:spcPct val="20000"/>
+              </a:spcBef>
+              <a:buClr>
+                <a:schemeClr val="accent1"/>
+              </a:buClr>
+              <a:buSzPct val="50000"/>
+              <a:buFont typeface="Wingdings" charset="2"/>
+              <a:buChar char="n"/>
+              <a:defRPr sz="2000">
+                <a:solidFill>
+                  <a:schemeClr val="tx1"/>
+                </a:solidFill>
+                <a:latin typeface="Tahoma" charset="0"/>
+              </a:defRPr>
+            </a:lvl5pPr>
+            <a:lvl6pPr marL="2514600" indent="-228600" eaLnBrk="0" fontAlgn="base" hangingPunct="0">
+              <a:spcBef>
+                <a:spcPct val="20000"/>
+              </a:spcBef>
+              <a:spcAft>
+                <a:spcPct val="0"/>
+              </a:spcAft>
+              <a:buClr>
+                <a:schemeClr val="accent1"/>
+              </a:buClr>
+              <a:buSzPct val="50000"/>
+              <a:buFont typeface="Wingdings" charset="2"/>
+              <a:buChar char="n"/>
+              <a:defRPr sz="2000">
+                <a:solidFill>
+                  <a:schemeClr val="tx1"/>
+                </a:solidFill>
+                <a:latin typeface="Tahoma" charset="0"/>
+              </a:defRPr>
+            </a:lvl6pPr>
+            <a:lvl7pPr marL="2971800" indent="-228600" eaLnBrk="0" fontAlgn="base" hangingPunct="0">
+              <a:spcBef>
+                <a:spcPct val="20000"/>
+              </a:spcBef>
+              <a:spcAft>
+                <a:spcPct val="0"/>
+              </a:spcAft>
+              <a:buClr>
+                <a:schemeClr val="accent1"/>
+              </a:buClr>
+              <a:buSzPct val="50000"/>
+              <a:buFont typeface="Wingdings" charset="2"/>
+              <a:buChar char="n"/>
+              <a:defRPr sz="2000">
+                <a:solidFill>
+                  <a:schemeClr val="tx1"/>
+                </a:solidFill>
+                <a:latin typeface="Tahoma" charset="0"/>
+              </a:defRPr>
+            </a:lvl7pPr>
+            <a:lvl8pPr marL="3429000" indent="-228600" eaLnBrk="0" fontAlgn="base" hangingPunct="0">
+              <a:spcBef>
+                <a:spcPct val="20000"/>
+              </a:spcBef>
+              <a:spcAft>
+                <a:spcPct val="0"/>
+              </a:spcAft>
+              <a:buClr>
+                <a:schemeClr val="accent1"/>
+              </a:buClr>
+              <a:buSzPct val="50000"/>
+              <a:buFont typeface="Wingdings" charset="2"/>
+              <a:buChar char="n"/>
+              <a:defRPr sz="2000">
+                <a:solidFill>
+                  <a:schemeClr val="tx1"/>
+                </a:solidFill>
+                <a:latin typeface="Tahoma" charset="0"/>
+              </a:defRPr>
+            </a:lvl8pPr>
+            <a:lvl9pPr marL="3886200" indent="-228600" eaLnBrk="0" fontAlgn="base" hangingPunct="0">
+              <a:spcBef>
+                <a:spcPct val="20000"/>
+              </a:spcBef>
+              <a:spcAft>
+                <a:spcPct val="0"/>
+              </a:spcAft>
+              <a:buClr>
+                <a:schemeClr val="accent1"/>
+              </a:buClr>
+              <a:buSzPct val="50000"/>
+              <a:buFont typeface="Wingdings" charset="2"/>
+              <a:buChar char="n"/>
+              <a:defRPr sz="2000">
+                <a:solidFill>
+                  <a:schemeClr val="tx1"/>
+                </a:solidFill>
+                <a:latin typeface="Tahoma" charset="0"/>
+              </a:defRPr>
+            </a:lvl9pPr>
+          </a:lstStyle>
+          <a:p>
+            <a:pPr algn="ctr" eaLnBrk="1" hangingPunct="1">
+              <a:spcBef>
+                <a:spcPct val="0"/>
+              </a:spcBef>
+              <a:buClrTx/>
+              <a:buSzTx/>
+              <a:buFontTx/>
+              <a:buNone/>
+            </a:pPr>
+            <a:r>
+              <a:rPr lang="en-US" altLang="en-US" sz="2000" b="1"/>
+              <a:t>plot(lm2,Subject ~ </a:t>
+            </a:r>
+            <a:r>
+              <a:rPr lang="en-US" altLang="en-US" sz="2000" b="1" dirty="0" err="1"/>
+              <a:t>resid</a:t>
+            </a:r>
+            <a:r>
+              <a:rPr lang="en-US" altLang="en-US" sz="2000" b="1" dirty="0"/>
+              <a:t>(.),</a:t>
+            </a:r>
+            <a:r>
+              <a:rPr lang="en-US" altLang="en-US" sz="2000" b="1" dirty="0" err="1"/>
+              <a:t>abline</a:t>
+            </a:r>
+            <a:r>
+              <a:rPr lang="en-US" altLang="en-US" sz="2000" b="1" dirty="0"/>
+              <a:t>=0)</a:t>
+            </a:r>
+          </a:p>
+        </p:txBody>
+      </p:sp>
+      <p:sp>
+        <p:nvSpPr>
+          <p:cNvPr id="102403" name="Text Box 7"/>
+          <p:cNvSpPr txBox="1">
+            <a:spLocks noChangeArrowheads="1"/>
+          </p:cNvSpPr>
+          <p:nvPr/>
+        </p:nvSpPr>
+        <p:spPr bwMode="auto">
+          <a:xfrm>
+            <a:off x="1676401" y="3352801"/>
+            <a:ext cx="3300413" cy="701675"/>
+          </a:xfrm>
+          <a:prstGeom prst="rect">
+            <a:avLst/>
+          </a:prstGeom>
+          <a:noFill/>
+          <a:ln>
+            <a:noFill/>
+          </a:ln>
+          <a:extLst>
+            <a:ext uri="{909E8E84-426E-40DD-AFC4-6F175D3DCCD1}">
+              <a14:hiddenFill xmlns:a14="http://schemas.microsoft.com/office/drawing/2010/main">
+                <a:solidFill>
+                  <a:srgbClr val="FFFFFF"/>
+                </a:solidFill>
+              </a14:hiddenFill>
+            </a:ext>
+            <a:ext uri="{91240B29-F687-4F45-9708-019B960494DF}">
+              <a14:hiddenLine xmlns:a14="http://schemas.microsoft.com/office/drawing/2010/main" w="9525">
+                <a:solidFill>
+                  <a:srgbClr val="000000"/>
+                </a:solidFill>
+                <a:miter lim="800000"/>
+                <a:headEnd/>
+                <a:tailEnd/>
+              </a14:hiddenLine>
+            </a:ext>
+          </a:extLst>
+        </p:spPr>
+        <p:txBody>
+          <a:bodyPr wrap="none">
+            <a:spAutoFit/>
+          </a:bodyPr>
+          <a:lstStyle>
+            <a:lvl1pPr>
+              <a:spcBef>
+                <a:spcPct val="20000"/>
+              </a:spcBef>
+              <a:buClr>
+                <a:schemeClr val="folHlink"/>
+              </a:buClr>
+              <a:buSzPct val="60000"/>
+              <a:buFont typeface="Wingdings" charset="2"/>
+              <a:buChar char="n"/>
+              <a:defRPr sz="3200">
+                <a:solidFill>
+                  <a:schemeClr val="tx1"/>
+                </a:solidFill>
+                <a:latin typeface="Tahoma" charset="0"/>
+              </a:defRPr>
+            </a:lvl1pPr>
+            <a:lvl2pPr marL="742950" indent="-285750">
+              <a:spcBef>
+                <a:spcPct val="20000"/>
+              </a:spcBef>
+              <a:buClr>
+                <a:schemeClr val="hlink"/>
+              </a:buClr>
+              <a:buSzPct val="55000"/>
+              <a:buFont typeface="Wingdings" charset="2"/>
+              <a:buChar char="n"/>
+              <a:defRPr sz="2800">
+                <a:solidFill>
+                  <a:schemeClr val="tx1"/>
+                </a:solidFill>
+                <a:latin typeface="Tahoma" charset="0"/>
+              </a:defRPr>
+            </a:lvl2pPr>
+            <a:lvl3pPr marL="1143000" indent="-228600">
+              <a:spcBef>
+                <a:spcPct val="20000"/>
+              </a:spcBef>
+              <a:buClr>
+                <a:schemeClr val="folHlink"/>
+              </a:buClr>
+              <a:buSzPct val="50000"/>
+              <a:buFont typeface="Wingdings" charset="2"/>
+              <a:buChar char="n"/>
+              <a:defRPr sz="2400">
+                <a:solidFill>
+                  <a:schemeClr val="tx1"/>
+                </a:solidFill>
+                <a:latin typeface="Tahoma" charset="0"/>
+              </a:defRPr>
+            </a:lvl3pPr>
+            <a:lvl4pPr marL="1600200" indent="-228600">
+              <a:spcBef>
+                <a:spcPct val="20000"/>
+              </a:spcBef>
+              <a:buClr>
+                <a:schemeClr val="accent2"/>
+              </a:buClr>
+              <a:buSzPct val="55000"/>
+              <a:buFont typeface="Wingdings" charset="2"/>
+              <a:buChar char="n"/>
+              <a:defRPr sz="2000">
+                <a:solidFill>
+                  <a:schemeClr val="tx1"/>
+                </a:solidFill>
+                <a:latin typeface="Tahoma" charset="0"/>
+              </a:defRPr>
+            </a:lvl4pPr>
+            <a:lvl5pPr marL="2057400" indent="-228600">
+              <a:spcBef>
+                <a:spcPct val="20000"/>
+              </a:spcBef>
+              <a:buClr>
+                <a:schemeClr val="accent1"/>
+              </a:buClr>
+              <a:buSzPct val="50000"/>
+              <a:buFont typeface="Wingdings" charset="2"/>
+              <a:buChar char="n"/>
+              <a:defRPr sz="2000">
+                <a:solidFill>
+                  <a:schemeClr val="tx1"/>
+                </a:solidFill>
+                <a:latin typeface="Tahoma" charset="0"/>
+              </a:defRPr>
+            </a:lvl5pPr>
+            <a:lvl6pPr marL="2514600" indent="-228600" eaLnBrk="0" fontAlgn="base" hangingPunct="0">
+              <a:spcBef>
+                <a:spcPct val="20000"/>
+              </a:spcBef>
+              <a:spcAft>
+                <a:spcPct val="0"/>
+              </a:spcAft>
+              <a:buClr>
+                <a:schemeClr val="accent1"/>
+              </a:buClr>
+              <a:buSzPct val="50000"/>
+              <a:buFont typeface="Wingdings" charset="2"/>
+              <a:buChar char="n"/>
+              <a:defRPr sz="2000">
+                <a:solidFill>
+                  <a:schemeClr val="tx1"/>
+                </a:solidFill>
+                <a:latin typeface="Tahoma" charset="0"/>
+              </a:defRPr>
+            </a:lvl6pPr>
+            <a:lvl7pPr marL="2971800" indent="-228600" eaLnBrk="0" fontAlgn="base" hangingPunct="0">
+              <a:spcBef>
+                <a:spcPct val="20000"/>
+              </a:spcBef>
+              <a:spcAft>
+                <a:spcPct val="0"/>
+              </a:spcAft>
+              <a:buClr>
+                <a:schemeClr val="accent1"/>
+              </a:buClr>
+              <a:buSzPct val="50000"/>
+              <a:buFont typeface="Wingdings" charset="2"/>
+              <a:buChar char="n"/>
+              <a:defRPr sz="2000">
+                <a:solidFill>
+                  <a:schemeClr val="tx1"/>
+                </a:solidFill>
+                <a:latin typeface="Tahoma" charset="0"/>
+              </a:defRPr>
+            </a:lvl7pPr>
+            <a:lvl8pPr marL="3429000" indent="-228600" eaLnBrk="0" fontAlgn="base" hangingPunct="0">
+              <a:spcBef>
+                <a:spcPct val="20000"/>
+              </a:spcBef>
+              <a:spcAft>
+                <a:spcPct val="0"/>
+              </a:spcAft>
+              <a:buClr>
+                <a:schemeClr val="accent1"/>
+              </a:buClr>
+              <a:buSzPct val="50000"/>
+              <a:buFont typeface="Wingdings" charset="2"/>
+              <a:buChar char="n"/>
+              <a:defRPr sz="2000">
+                <a:solidFill>
+                  <a:schemeClr val="tx1"/>
+                </a:solidFill>
+                <a:latin typeface="Tahoma" charset="0"/>
+              </a:defRPr>
+            </a:lvl8pPr>
+            <a:lvl9pPr marL="3886200" indent="-228600" eaLnBrk="0" fontAlgn="base" hangingPunct="0">
+              <a:spcBef>
+                <a:spcPct val="20000"/>
+              </a:spcBef>
+              <a:spcAft>
+                <a:spcPct val="0"/>
+              </a:spcAft>
+              <a:buClr>
+                <a:schemeClr val="accent1"/>
+              </a:buClr>
+              <a:buSzPct val="50000"/>
+              <a:buFont typeface="Wingdings" charset="2"/>
+              <a:buChar char="n"/>
+              <a:defRPr sz="2000">
+                <a:solidFill>
+                  <a:schemeClr val="tx1"/>
+                </a:solidFill>
+                <a:latin typeface="Tahoma" charset="0"/>
+              </a:defRPr>
+            </a:lvl9pPr>
+          </a:lstStyle>
+          <a:p>
+            <a:pPr algn="ctr" eaLnBrk="1" hangingPunct="1">
+              <a:spcBef>
+                <a:spcPct val="0"/>
+              </a:spcBef>
+              <a:buClrTx/>
+              <a:buSzTx/>
+              <a:buFontTx/>
+              <a:buNone/>
+            </a:pPr>
+            <a:r>
+              <a:rPr lang="en-US" altLang="en-US" sz="2000"/>
+              <a:t>Try “intervals (lm2)” to see </a:t>
+            </a:r>
+          </a:p>
+          <a:p>
+            <a:pPr algn="ctr" eaLnBrk="1" hangingPunct="1">
+              <a:spcBef>
+                <a:spcPct val="0"/>
+              </a:spcBef>
+              <a:buClrTx/>
+              <a:buSzTx/>
+              <a:buFontTx/>
+              <a:buNone/>
+            </a:pPr>
+            <a:r>
+              <a:rPr lang="en-US" altLang="en-US" sz="2000"/>
+              <a:t>the confidence intervals</a:t>
+            </a:r>
+          </a:p>
+        </p:txBody>
+      </p:sp>
+      <p:pic>
+        <p:nvPicPr>
+          <p:cNvPr id="102404" name="Picture 10"/>
+          <p:cNvPicPr>
+            <a:picLocks noChangeAspect="1" noChangeArrowheads="1"/>
+          </p:cNvPicPr>
+          <p:nvPr/>
+        </p:nvPicPr>
+        <p:blipFill>
+          <a:blip r:embed="rId3">
+            <a:extLst>
+              <a:ext uri="{28A0092B-C50C-407E-A947-70E740481C1C}">
+                <a14:useLocalDpi xmlns:a14="http://schemas.microsoft.com/office/drawing/2010/main" val="0"/>
+              </a:ext>
+            </a:extLst>
+          </a:blip>
+          <a:srcRect/>
+          <a:stretch>
+            <a:fillRect/>
+          </a:stretch>
+        </p:blipFill>
+        <p:spPr bwMode="auto">
+          <a:xfrm>
+            <a:off x="6030914" y="2228850"/>
+            <a:ext cx="4637087" cy="4629150"/>
+          </a:xfrm>
+          <a:prstGeom prst="rect">
+            <a:avLst/>
+          </a:prstGeom>
+          <a:noFill/>
+          <a:ln>
+            <a:noFill/>
+          </a:ln>
+          <a:extLst>
+            <a:ext uri="{909E8E84-426E-40DD-AFC4-6F175D3DCCD1}">
+              <a14:hiddenFill xmlns:a14="http://schemas.microsoft.com/office/drawing/2010/main">
+                <a:solidFill>
+                  <a:srgbClr val="FFFFFF"/>
+                </a:solidFill>
+              </a14:hiddenFill>
+            </a:ext>
+            <a:ext uri="{91240B29-F687-4F45-9708-019B960494DF}">
+              <a14:hiddenLine xmlns:a14="http://schemas.microsoft.com/office/drawing/2010/main" w="9525">
+                <a:solidFill>
+                  <a:srgbClr val="000000"/>
+                </a:solidFill>
+                <a:miter lim="800000"/>
+                <a:headEnd/>
+                <a:tailEnd/>
+              </a14:hiddenLine>
+            </a:ext>
+          </a:extLst>
+        </p:spPr>
+      </p:pic>
+    </p:spTree>
+    <p:extLst>
+      <p:ext uri="{BB962C8B-B14F-4D97-AF65-F5344CB8AC3E}">
+        <p14:creationId xmlns:p14="http://schemas.microsoft.com/office/powerpoint/2010/main" val="306920238"/>
       </p:ext>
     </p:extLst>
   </p:cSld>
@@ -24947,609 +24837,6 @@
       </p:grpSpPr>
       <p:sp>
         <p:nvSpPr>
-          <p:cNvPr id="40962" name="Rectangle 2"/>
-          <p:cNvSpPr>
-            <a:spLocks noGrp="1" noChangeArrowheads="1"/>
-          </p:cNvSpPr>
-          <p:nvPr>
-            <p:ph type="title"/>
-          </p:nvPr>
-        </p:nvSpPr>
-        <p:spPr/>
-        <p:txBody>
-          <a:bodyPr/>
-          <a:lstStyle/>
-          <a:p>
-            <a:pPr algn="ctr" eaLnBrk="1" hangingPunct="1">
-              <a:defRPr/>
-            </a:pPr>
-            <a:r>
-              <a:rPr lang="en-US" altLang="en-US" sz="4000"/>
-              <a:t>Fitting Length and Age Data</a:t>
-            </a:r>
-            <a:br>
-              <a:rPr lang="en-US" altLang="en-US" sz="4000"/>
-            </a:br>
-            <a:r>
-              <a:rPr lang="en-US" altLang="en-US" sz="4000"/>
-              <a:t>(Non-linear mixed model-II)</a:t>
-            </a:r>
-          </a:p>
-        </p:txBody>
-      </p:sp>
-      <p:sp>
-        <p:nvSpPr>
-          <p:cNvPr id="102402" name="Rectangle 6"/>
-          <p:cNvSpPr>
-            <a:spLocks noChangeArrowheads="1"/>
-          </p:cNvSpPr>
-          <p:nvPr/>
-        </p:nvSpPr>
-        <p:spPr bwMode="auto">
-          <a:xfrm>
-            <a:off x="1905000" y="2030412"/>
-            <a:ext cx="4960938" cy="396875"/>
-          </a:xfrm>
-          <a:prstGeom prst="rect">
-            <a:avLst/>
-          </a:prstGeom>
-          <a:noFill/>
-          <a:ln>
-            <a:noFill/>
-          </a:ln>
-          <a:extLst>
-            <a:ext uri="{909E8E84-426E-40DD-AFC4-6F175D3DCCD1}">
-              <a14:hiddenFill xmlns:a14="http://schemas.microsoft.com/office/drawing/2010/main">
-                <a:solidFill>
-                  <a:srgbClr val="FFFFFF"/>
-                </a:solidFill>
-              </a14:hiddenFill>
-            </a:ext>
-            <a:ext uri="{91240B29-F687-4F45-9708-019B960494DF}">
-              <a14:hiddenLine xmlns:a14="http://schemas.microsoft.com/office/drawing/2010/main" w="9525">
-                <a:solidFill>
-                  <a:srgbClr val="000000"/>
-                </a:solidFill>
-                <a:miter lim="800000"/>
-                <a:headEnd/>
-                <a:tailEnd/>
-              </a14:hiddenLine>
-            </a:ext>
-          </a:extLst>
-        </p:spPr>
-        <p:txBody>
-          <a:bodyPr wrap="none">
-            <a:spAutoFit/>
-          </a:bodyPr>
-          <a:lstStyle>
-            <a:lvl1pPr>
-              <a:spcBef>
-                <a:spcPct val="20000"/>
-              </a:spcBef>
-              <a:buClr>
-                <a:schemeClr val="folHlink"/>
-              </a:buClr>
-              <a:buSzPct val="60000"/>
-              <a:buFont typeface="Wingdings" charset="2"/>
-              <a:buChar char="n"/>
-              <a:defRPr sz="3200">
-                <a:solidFill>
-                  <a:schemeClr val="tx1"/>
-                </a:solidFill>
-                <a:latin typeface="Tahoma" charset="0"/>
-              </a:defRPr>
-            </a:lvl1pPr>
-            <a:lvl2pPr marL="742950" indent="-285750">
-              <a:spcBef>
-                <a:spcPct val="20000"/>
-              </a:spcBef>
-              <a:buClr>
-                <a:schemeClr val="hlink"/>
-              </a:buClr>
-              <a:buSzPct val="55000"/>
-              <a:buFont typeface="Wingdings" charset="2"/>
-              <a:buChar char="n"/>
-              <a:defRPr sz="2800">
-                <a:solidFill>
-                  <a:schemeClr val="tx1"/>
-                </a:solidFill>
-                <a:latin typeface="Tahoma" charset="0"/>
-              </a:defRPr>
-            </a:lvl2pPr>
-            <a:lvl3pPr marL="1143000" indent="-228600">
-              <a:spcBef>
-                <a:spcPct val="20000"/>
-              </a:spcBef>
-              <a:buClr>
-                <a:schemeClr val="folHlink"/>
-              </a:buClr>
-              <a:buSzPct val="50000"/>
-              <a:buFont typeface="Wingdings" charset="2"/>
-              <a:buChar char="n"/>
-              <a:defRPr sz="2400">
-                <a:solidFill>
-                  <a:schemeClr val="tx1"/>
-                </a:solidFill>
-                <a:latin typeface="Tahoma" charset="0"/>
-              </a:defRPr>
-            </a:lvl3pPr>
-            <a:lvl4pPr marL="1600200" indent="-228600">
-              <a:spcBef>
-                <a:spcPct val="20000"/>
-              </a:spcBef>
-              <a:buClr>
-                <a:schemeClr val="accent2"/>
-              </a:buClr>
-              <a:buSzPct val="55000"/>
-              <a:buFont typeface="Wingdings" charset="2"/>
-              <a:buChar char="n"/>
-              <a:defRPr sz="2000">
-                <a:solidFill>
-                  <a:schemeClr val="tx1"/>
-                </a:solidFill>
-                <a:latin typeface="Tahoma" charset="0"/>
-              </a:defRPr>
-            </a:lvl4pPr>
-            <a:lvl5pPr marL="2057400" indent="-228600">
-              <a:spcBef>
-                <a:spcPct val="20000"/>
-              </a:spcBef>
-              <a:buClr>
-                <a:schemeClr val="accent1"/>
-              </a:buClr>
-              <a:buSzPct val="50000"/>
-              <a:buFont typeface="Wingdings" charset="2"/>
-              <a:buChar char="n"/>
-              <a:defRPr sz="2000">
-                <a:solidFill>
-                  <a:schemeClr val="tx1"/>
-                </a:solidFill>
-                <a:latin typeface="Tahoma" charset="0"/>
-              </a:defRPr>
-            </a:lvl5pPr>
-            <a:lvl6pPr marL="2514600" indent="-228600" eaLnBrk="0" fontAlgn="base" hangingPunct="0">
-              <a:spcBef>
-                <a:spcPct val="20000"/>
-              </a:spcBef>
-              <a:spcAft>
-                <a:spcPct val="0"/>
-              </a:spcAft>
-              <a:buClr>
-                <a:schemeClr val="accent1"/>
-              </a:buClr>
-              <a:buSzPct val="50000"/>
-              <a:buFont typeface="Wingdings" charset="2"/>
-              <a:buChar char="n"/>
-              <a:defRPr sz="2000">
-                <a:solidFill>
-                  <a:schemeClr val="tx1"/>
-                </a:solidFill>
-                <a:latin typeface="Tahoma" charset="0"/>
-              </a:defRPr>
-            </a:lvl6pPr>
-            <a:lvl7pPr marL="2971800" indent="-228600" eaLnBrk="0" fontAlgn="base" hangingPunct="0">
-              <a:spcBef>
-                <a:spcPct val="20000"/>
-              </a:spcBef>
-              <a:spcAft>
-                <a:spcPct val="0"/>
-              </a:spcAft>
-              <a:buClr>
-                <a:schemeClr val="accent1"/>
-              </a:buClr>
-              <a:buSzPct val="50000"/>
-              <a:buFont typeface="Wingdings" charset="2"/>
-              <a:buChar char="n"/>
-              <a:defRPr sz="2000">
-                <a:solidFill>
-                  <a:schemeClr val="tx1"/>
-                </a:solidFill>
-                <a:latin typeface="Tahoma" charset="0"/>
-              </a:defRPr>
-            </a:lvl7pPr>
-            <a:lvl8pPr marL="3429000" indent="-228600" eaLnBrk="0" fontAlgn="base" hangingPunct="0">
-              <a:spcBef>
-                <a:spcPct val="20000"/>
-              </a:spcBef>
-              <a:spcAft>
-                <a:spcPct val="0"/>
-              </a:spcAft>
-              <a:buClr>
-                <a:schemeClr val="accent1"/>
-              </a:buClr>
-              <a:buSzPct val="50000"/>
-              <a:buFont typeface="Wingdings" charset="2"/>
-              <a:buChar char="n"/>
-              <a:defRPr sz="2000">
-                <a:solidFill>
-                  <a:schemeClr val="tx1"/>
-                </a:solidFill>
-                <a:latin typeface="Tahoma" charset="0"/>
-              </a:defRPr>
-            </a:lvl8pPr>
-            <a:lvl9pPr marL="3886200" indent="-228600" eaLnBrk="0" fontAlgn="base" hangingPunct="0">
-              <a:spcBef>
-                <a:spcPct val="20000"/>
-              </a:spcBef>
-              <a:spcAft>
-                <a:spcPct val="0"/>
-              </a:spcAft>
-              <a:buClr>
-                <a:schemeClr val="accent1"/>
-              </a:buClr>
-              <a:buSzPct val="50000"/>
-              <a:buFont typeface="Wingdings" charset="2"/>
-              <a:buChar char="n"/>
-              <a:defRPr sz="2000">
-                <a:solidFill>
-                  <a:schemeClr val="tx1"/>
-                </a:solidFill>
-                <a:latin typeface="Tahoma" charset="0"/>
-              </a:defRPr>
-            </a:lvl9pPr>
-          </a:lstStyle>
-          <a:p>
-            <a:pPr algn="ctr" eaLnBrk="1" hangingPunct="1">
-              <a:spcBef>
-                <a:spcPct val="0"/>
-              </a:spcBef>
-              <a:buClrTx/>
-              <a:buSzTx/>
-              <a:buFontTx/>
-              <a:buNone/>
-            </a:pPr>
-            <a:r>
-              <a:rPr lang="en-US" altLang="en-US" sz="2000" b="1"/>
-              <a:t>plot(lm2,Subject ~ </a:t>
-            </a:r>
-            <a:r>
-              <a:rPr lang="en-US" altLang="en-US" sz="2000" b="1" dirty="0" err="1"/>
-              <a:t>resid</a:t>
-            </a:r>
-            <a:r>
-              <a:rPr lang="en-US" altLang="en-US" sz="2000" b="1" dirty="0"/>
-              <a:t>(.),</a:t>
-            </a:r>
-            <a:r>
-              <a:rPr lang="en-US" altLang="en-US" sz="2000" b="1" dirty="0" err="1"/>
-              <a:t>abline</a:t>
-            </a:r>
-            <a:r>
-              <a:rPr lang="en-US" altLang="en-US" sz="2000" b="1" dirty="0"/>
-              <a:t>=0)</a:t>
-            </a:r>
-          </a:p>
-        </p:txBody>
-      </p:sp>
-      <p:sp>
-        <p:nvSpPr>
-          <p:cNvPr id="102403" name="Text Box 7"/>
-          <p:cNvSpPr txBox="1">
-            <a:spLocks noChangeArrowheads="1"/>
-          </p:cNvSpPr>
-          <p:nvPr/>
-        </p:nvSpPr>
-        <p:spPr bwMode="auto">
-          <a:xfrm>
-            <a:off x="1676401" y="3352801"/>
-            <a:ext cx="3300413" cy="701675"/>
-          </a:xfrm>
-          <a:prstGeom prst="rect">
-            <a:avLst/>
-          </a:prstGeom>
-          <a:noFill/>
-          <a:ln>
-            <a:noFill/>
-          </a:ln>
-          <a:extLst>
-            <a:ext uri="{909E8E84-426E-40DD-AFC4-6F175D3DCCD1}">
-              <a14:hiddenFill xmlns:a14="http://schemas.microsoft.com/office/drawing/2010/main">
-                <a:solidFill>
-                  <a:srgbClr val="FFFFFF"/>
-                </a:solidFill>
-              </a14:hiddenFill>
-            </a:ext>
-            <a:ext uri="{91240B29-F687-4F45-9708-019B960494DF}">
-              <a14:hiddenLine xmlns:a14="http://schemas.microsoft.com/office/drawing/2010/main" w="9525">
-                <a:solidFill>
-                  <a:srgbClr val="000000"/>
-                </a:solidFill>
-                <a:miter lim="800000"/>
-                <a:headEnd/>
-                <a:tailEnd/>
-              </a14:hiddenLine>
-            </a:ext>
-          </a:extLst>
-        </p:spPr>
-        <p:txBody>
-          <a:bodyPr wrap="none">
-            <a:spAutoFit/>
-          </a:bodyPr>
-          <a:lstStyle>
-            <a:lvl1pPr>
-              <a:spcBef>
-                <a:spcPct val="20000"/>
-              </a:spcBef>
-              <a:buClr>
-                <a:schemeClr val="folHlink"/>
-              </a:buClr>
-              <a:buSzPct val="60000"/>
-              <a:buFont typeface="Wingdings" charset="2"/>
-              <a:buChar char="n"/>
-              <a:defRPr sz="3200">
-                <a:solidFill>
-                  <a:schemeClr val="tx1"/>
-                </a:solidFill>
-                <a:latin typeface="Tahoma" charset="0"/>
-              </a:defRPr>
-            </a:lvl1pPr>
-            <a:lvl2pPr marL="742950" indent="-285750">
-              <a:spcBef>
-                <a:spcPct val="20000"/>
-              </a:spcBef>
-              <a:buClr>
-                <a:schemeClr val="hlink"/>
-              </a:buClr>
-              <a:buSzPct val="55000"/>
-              <a:buFont typeface="Wingdings" charset="2"/>
-              <a:buChar char="n"/>
-              <a:defRPr sz="2800">
-                <a:solidFill>
-                  <a:schemeClr val="tx1"/>
-                </a:solidFill>
-                <a:latin typeface="Tahoma" charset="0"/>
-              </a:defRPr>
-            </a:lvl2pPr>
-            <a:lvl3pPr marL="1143000" indent="-228600">
-              <a:spcBef>
-                <a:spcPct val="20000"/>
-              </a:spcBef>
-              <a:buClr>
-                <a:schemeClr val="folHlink"/>
-              </a:buClr>
-              <a:buSzPct val="50000"/>
-              <a:buFont typeface="Wingdings" charset="2"/>
-              <a:buChar char="n"/>
-              <a:defRPr sz="2400">
-                <a:solidFill>
-                  <a:schemeClr val="tx1"/>
-                </a:solidFill>
-                <a:latin typeface="Tahoma" charset="0"/>
-              </a:defRPr>
-            </a:lvl3pPr>
-            <a:lvl4pPr marL="1600200" indent="-228600">
-              <a:spcBef>
-                <a:spcPct val="20000"/>
-              </a:spcBef>
-              <a:buClr>
-                <a:schemeClr val="accent2"/>
-              </a:buClr>
-              <a:buSzPct val="55000"/>
-              <a:buFont typeface="Wingdings" charset="2"/>
-              <a:buChar char="n"/>
-              <a:defRPr sz="2000">
-                <a:solidFill>
-                  <a:schemeClr val="tx1"/>
-                </a:solidFill>
-                <a:latin typeface="Tahoma" charset="0"/>
-              </a:defRPr>
-            </a:lvl4pPr>
-            <a:lvl5pPr marL="2057400" indent="-228600">
-              <a:spcBef>
-                <a:spcPct val="20000"/>
-              </a:spcBef>
-              <a:buClr>
-                <a:schemeClr val="accent1"/>
-              </a:buClr>
-              <a:buSzPct val="50000"/>
-              <a:buFont typeface="Wingdings" charset="2"/>
-              <a:buChar char="n"/>
-              <a:defRPr sz="2000">
-                <a:solidFill>
-                  <a:schemeClr val="tx1"/>
-                </a:solidFill>
-                <a:latin typeface="Tahoma" charset="0"/>
-              </a:defRPr>
-            </a:lvl5pPr>
-            <a:lvl6pPr marL="2514600" indent="-228600" eaLnBrk="0" fontAlgn="base" hangingPunct="0">
-              <a:spcBef>
-                <a:spcPct val="20000"/>
-              </a:spcBef>
-              <a:spcAft>
-                <a:spcPct val="0"/>
-              </a:spcAft>
-              <a:buClr>
-                <a:schemeClr val="accent1"/>
-              </a:buClr>
-              <a:buSzPct val="50000"/>
-              <a:buFont typeface="Wingdings" charset="2"/>
-              <a:buChar char="n"/>
-              <a:defRPr sz="2000">
-                <a:solidFill>
-                  <a:schemeClr val="tx1"/>
-                </a:solidFill>
-                <a:latin typeface="Tahoma" charset="0"/>
-              </a:defRPr>
-            </a:lvl6pPr>
-            <a:lvl7pPr marL="2971800" indent="-228600" eaLnBrk="0" fontAlgn="base" hangingPunct="0">
-              <a:spcBef>
-                <a:spcPct val="20000"/>
-              </a:spcBef>
-              <a:spcAft>
-                <a:spcPct val="0"/>
-              </a:spcAft>
-              <a:buClr>
-                <a:schemeClr val="accent1"/>
-              </a:buClr>
-              <a:buSzPct val="50000"/>
-              <a:buFont typeface="Wingdings" charset="2"/>
-              <a:buChar char="n"/>
-              <a:defRPr sz="2000">
-                <a:solidFill>
-                  <a:schemeClr val="tx1"/>
-                </a:solidFill>
-                <a:latin typeface="Tahoma" charset="0"/>
-              </a:defRPr>
-            </a:lvl7pPr>
-            <a:lvl8pPr marL="3429000" indent="-228600" eaLnBrk="0" fontAlgn="base" hangingPunct="0">
-              <a:spcBef>
-                <a:spcPct val="20000"/>
-              </a:spcBef>
-              <a:spcAft>
-                <a:spcPct val="0"/>
-              </a:spcAft>
-              <a:buClr>
-                <a:schemeClr val="accent1"/>
-              </a:buClr>
-              <a:buSzPct val="50000"/>
-              <a:buFont typeface="Wingdings" charset="2"/>
-              <a:buChar char="n"/>
-              <a:defRPr sz="2000">
-                <a:solidFill>
-                  <a:schemeClr val="tx1"/>
-                </a:solidFill>
-                <a:latin typeface="Tahoma" charset="0"/>
-              </a:defRPr>
-            </a:lvl8pPr>
-            <a:lvl9pPr marL="3886200" indent="-228600" eaLnBrk="0" fontAlgn="base" hangingPunct="0">
-              <a:spcBef>
-                <a:spcPct val="20000"/>
-              </a:spcBef>
-              <a:spcAft>
-                <a:spcPct val="0"/>
-              </a:spcAft>
-              <a:buClr>
-                <a:schemeClr val="accent1"/>
-              </a:buClr>
-              <a:buSzPct val="50000"/>
-              <a:buFont typeface="Wingdings" charset="2"/>
-              <a:buChar char="n"/>
-              <a:defRPr sz="2000">
-                <a:solidFill>
-                  <a:schemeClr val="tx1"/>
-                </a:solidFill>
-                <a:latin typeface="Tahoma" charset="0"/>
-              </a:defRPr>
-            </a:lvl9pPr>
-          </a:lstStyle>
-          <a:p>
-            <a:pPr algn="ctr" eaLnBrk="1" hangingPunct="1">
-              <a:spcBef>
-                <a:spcPct val="0"/>
-              </a:spcBef>
-              <a:buClrTx/>
-              <a:buSzTx/>
-              <a:buFontTx/>
-              <a:buNone/>
-            </a:pPr>
-            <a:r>
-              <a:rPr lang="en-US" altLang="en-US" sz="2000"/>
-              <a:t>Try “intervals (lm2)” to see </a:t>
-            </a:r>
-          </a:p>
-          <a:p>
-            <a:pPr algn="ctr" eaLnBrk="1" hangingPunct="1">
-              <a:spcBef>
-                <a:spcPct val="0"/>
-              </a:spcBef>
-              <a:buClrTx/>
-              <a:buSzTx/>
-              <a:buFontTx/>
-              <a:buNone/>
-            </a:pPr>
-            <a:r>
-              <a:rPr lang="en-US" altLang="en-US" sz="2000"/>
-              <a:t>the confidence intervals</a:t>
-            </a:r>
-          </a:p>
-        </p:txBody>
-      </p:sp>
-      <p:pic>
-        <p:nvPicPr>
-          <p:cNvPr id="102404" name="Picture 10"/>
-          <p:cNvPicPr>
-            <a:picLocks noChangeAspect="1" noChangeArrowheads="1"/>
-          </p:cNvPicPr>
-          <p:nvPr/>
-        </p:nvPicPr>
-        <p:blipFill>
-          <a:blip r:embed="rId3">
-            <a:extLst>
-              <a:ext uri="{28A0092B-C50C-407E-A947-70E740481C1C}">
-                <a14:useLocalDpi xmlns:a14="http://schemas.microsoft.com/office/drawing/2010/main" val="0"/>
-              </a:ext>
-            </a:extLst>
-          </a:blip>
-          <a:srcRect/>
-          <a:stretch>
-            <a:fillRect/>
-          </a:stretch>
-        </p:blipFill>
-        <p:spPr bwMode="auto">
-          <a:xfrm>
-            <a:off x="6030914" y="2228850"/>
-            <a:ext cx="4637087" cy="4629150"/>
-          </a:xfrm>
-          <a:prstGeom prst="rect">
-            <a:avLst/>
-          </a:prstGeom>
-          <a:noFill/>
-          <a:ln>
-            <a:noFill/>
-          </a:ln>
-          <a:extLst>
-            <a:ext uri="{909E8E84-426E-40DD-AFC4-6F175D3DCCD1}">
-              <a14:hiddenFill xmlns:a14="http://schemas.microsoft.com/office/drawing/2010/main">
-                <a:solidFill>
-                  <a:srgbClr val="FFFFFF"/>
-                </a:solidFill>
-              </a14:hiddenFill>
-            </a:ext>
-            <a:ext uri="{91240B29-F687-4F45-9708-019B960494DF}">
-              <a14:hiddenLine xmlns:a14="http://schemas.microsoft.com/office/drawing/2010/main" w="9525">
-                <a:solidFill>
-                  <a:srgbClr val="000000"/>
-                </a:solidFill>
-                <a:miter lim="800000"/>
-                <a:headEnd/>
-                <a:tailEnd/>
-              </a14:hiddenLine>
-            </a:ext>
-          </a:extLst>
-        </p:spPr>
-      </p:pic>
-    </p:spTree>
-    <p:extLst>
-      <p:ext uri="{BB962C8B-B14F-4D97-AF65-F5344CB8AC3E}">
-        <p14:creationId xmlns:p14="http://schemas.microsoft.com/office/powerpoint/2010/main" val="306920238"/>
-      </p:ext>
-    </p:extLst>
-  </p:cSld>
-  <p:clrMapOvr>
-    <a:masterClrMapping/>
-  </p:clrMapOvr>
-</p:sld>
-</file>
-
-<file path=ppt/slides/slide61.xml><?xml version="1.0" encoding="utf-8"?>
-<p:sld xmlns:a="http://schemas.openxmlformats.org/drawingml/2006/main" xmlns:r="http://schemas.openxmlformats.org/officeDocument/2006/relationships" xmlns:p="http://schemas.openxmlformats.org/presentationml/2006/main">
-  <p:cSld>
-    <p:spTree>
-      <p:nvGrpSpPr>
-        <p:cNvPr id="1" name=""/>
-        <p:cNvGrpSpPr/>
-        <p:nvPr/>
-      </p:nvGrpSpPr>
-      <p:grpSpPr>
-        <a:xfrm>
-          <a:off x="0" y="0"/>
-          <a:ext cx="0" cy="0"/>
-          <a:chOff x="0" y="0"/>
-          <a:chExt cx="0" cy="0"/>
-        </a:xfrm>
-      </p:grpSpPr>
-      <p:sp>
-        <p:nvSpPr>
           <p:cNvPr id="43010" name="Rectangle 2"/>
           <p:cNvSpPr>
             <a:spLocks noGrp="1" noChangeArrowheads="1"/>
@@ -26112,7 +25399,7 @@
 </p:sld>
 </file>
 
-<file path=ppt/slides/slide62.xml><?xml version="1.0" encoding="utf-8"?>
+<file path=ppt/slides/slide61.xml><?xml version="1.0" encoding="utf-8"?>
 <p:sld xmlns:a="http://schemas.openxmlformats.org/drawingml/2006/main" xmlns:r="http://schemas.openxmlformats.org/officeDocument/2006/relationships" xmlns:p="http://schemas.openxmlformats.org/presentationml/2006/main">
   <p:cSld>
     <p:spTree>
@@ -26791,7 +26078,7 @@
 </p:sld>
 </file>
 
-<file path=ppt/slides/slide63.xml><?xml version="1.0" encoding="utf-8"?>
+<file path=ppt/slides/slide62.xml><?xml version="1.0" encoding="utf-8"?>
 <p:sld xmlns:a="http://schemas.openxmlformats.org/drawingml/2006/main" xmlns:r="http://schemas.openxmlformats.org/officeDocument/2006/relationships" xmlns:p="http://schemas.openxmlformats.org/presentationml/2006/main">
   <p:cSld>
     <p:spTree>
